--- a/docs/서버실_출입관리_완료보고.pptx
+++ b/docs/서버실_출입관리_완료보고.pptx
@@ -5,7 +5,7 @@
     <p:sldMasterId id="2147483648" r:id="rId1"/>
   </p:sldMasterIdLst>
   <p:notesMasterIdLst>
-    <p:notesMasterId r:id="rId8"/>
+    <p:notesMasterId r:id="rId7"/>
   </p:notesMasterIdLst>
   <p:sldIdLst>
     <p:sldId id="256" r:id="rId2"/>
@@ -13,7 +13,6 @@
     <p:sldId id="258" r:id="rId4"/>
     <p:sldId id="260" r:id="rId5"/>
     <p:sldId id="264" r:id="rId6"/>
-    <p:sldId id="262" r:id="rId7"/>
   </p:sldIdLst>
   <p:sldSz cx="12192000" cy="6858000"/>
   <p:notesSz cx="6858000" cy="9144000"/>
@@ -9753,440 +9752,6 @@
     <p:extLst>
       <p:ext uri="{BB962C8B-B14F-4D97-AF65-F5344CB8AC3E}">
         <p14:creationId xmlns:p14="http://schemas.microsoft.com/office/powerpoint/2010/main" val="1433765959"/>
-      </p:ext>
-    </p:extLst>
-  </p:cSld>
-  <p:clrMapOvr>
-    <a:masterClrMapping/>
-  </p:clrMapOvr>
-</p:sld>
-</file>
-
-<file path=ppt/slides/slide6.xml><?xml version="1.0" encoding="utf-8"?>
-<p:sld xmlns:a="http://schemas.openxmlformats.org/drawingml/2006/main" xmlns:r="http://schemas.openxmlformats.org/officeDocument/2006/relationships" xmlns:p="http://schemas.openxmlformats.org/presentationml/2006/main">
-  <p:cSld>
-    <p:bg>
-      <p:bgPr>
-        <a:solidFill>
-          <a:srgbClr val="222B45"/>
-        </a:solidFill>
-        <a:effectLst/>
-      </p:bgPr>
-    </p:bg>
-    <p:spTree>
-      <p:nvGrpSpPr>
-        <p:cNvPr id="1" name=""/>
-        <p:cNvGrpSpPr/>
-        <p:nvPr/>
-      </p:nvGrpSpPr>
-      <p:grpSpPr>
-        <a:xfrm>
-          <a:off x="0" y="0"/>
-          <a:ext cx="0" cy="0"/>
-          <a:chOff x="0" y="0"/>
-          <a:chExt cx="0" cy="0"/>
-        </a:xfrm>
-      </p:grpSpPr>
-      <p:sp>
-        <p:nvSpPr>
-          <p:cNvPr id="2" name="TextBox 1"/>
-          <p:cNvSpPr txBox="1"/>
-          <p:nvPr/>
-        </p:nvSpPr>
-        <p:spPr>
-          <a:xfrm>
-            <a:off x="914400" y="914400"/>
-            <a:ext cx="10360152" cy="731520"/>
-          </a:xfrm>
-          <a:prstGeom prst="rect">
-            <a:avLst/>
-          </a:prstGeom>
-          <a:noFill/>
-        </p:spPr>
-        <p:txBody>
-          <a:bodyPr wrap="square" lIns="25400" tIns="25400" rIns="25400" bIns="25400" anchor="t">
-            <a:spAutoFit/>
-          </a:bodyPr>
-          <a:lstStyle/>
-          <a:p>
-            <a:pPr algn="ctr"/>
-            <a:r>
-              <a:rPr sz="3200" b="1" dirty="0" err="1">
-                <a:solidFill>
-                  <a:srgbClr val="FFFFFF"/>
-                </a:solidFill>
-                <a:latin typeface="맑은 고딕"/>
-              </a:rPr>
-              <a:t>개발</a:t>
-            </a:r>
-            <a:r>
-              <a:rPr sz="3200" b="1" dirty="0">
-                <a:solidFill>
-                  <a:srgbClr val="FFFFFF"/>
-                </a:solidFill>
-                <a:latin typeface="맑은 고딕"/>
-              </a:rPr>
-              <a:t> </a:t>
-            </a:r>
-            <a:r>
-              <a:rPr sz="3200" b="1" dirty="0" err="1">
-                <a:solidFill>
-                  <a:srgbClr val="FFFFFF"/>
-                </a:solidFill>
-                <a:latin typeface="맑은 고딕"/>
-              </a:rPr>
-              <a:t>완료</a:t>
-            </a:r>
-            <a:r>
-              <a:rPr sz="3200" b="1" dirty="0">
-                <a:solidFill>
-                  <a:srgbClr val="FFFFFF"/>
-                </a:solidFill>
-                <a:latin typeface="맑은 고딕"/>
-              </a:rPr>
-              <a:t> </a:t>
-            </a:r>
-            <a:r>
-              <a:rPr sz="3200" b="1" dirty="0" err="1">
-                <a:solidFill>
-                  <a:srgbClr val="FFFFFF"/>
-                </a:solidFill>
-                <a:latin typeface="맑은 고딕"/>
-              </a:rPr>
-              <a:t>요약</a:t>
-            </a:r>
-            <a:endParaRPr sz="3200" b="1" dirty="0">
-              <a:solidFill>
-                <a:srgbClr val="FFFFFF"/>
-              </a:solidFill>
-              <a:latin typeface="맑은 고딕"/>
-            </a:endParaRPr>
-          </a:p>
-        </p:txBody>
-      </p:sp>
-      <p:sp>
-        <p:nvSpPr>
-          <p:cNvPr id="3" name="Rectangle 2"/>
-          <p:cNvSpPr/>
-          <p:nvPr/>
-        </p:nvSpPr>
-        <p:spPr>
-          <a:xfrm>
-            <a:off x="1463040" y="2011680"/>
-            <a:ext cx="9262872" cy="3200400"/>
-          </a:xfrm>
-          <a:prstGeom prst="rect">
-            <a:avLst/>
-          </a:prstGeom>
-          <a:solidFill>
-            <a:srgbClr val="2A3552"/>
-          </a:solidFill>
-          <a:ln>
-            <a:noFill/>
-          </a:ln>
-          <a:effectLst/>
-        </p:spPr>
-        <p:style>
-          <a:lnRef idx="1">
-            <a:schemeClr val="accent1"/>
-          </a:lnRef>
-          <a:fillRef idx="3">
-            <a:schemeClr val="accent1"/>
-          </a:fillRef>
-          <a:effectRef idx="2">
-            <a:schemeClr val="accent1"/>
-          </a:effectRef>
-          <a:fontRef idx="minor">
-            <a:schemeClr val="lt1"/>
-          </a:fontRef>
-        </p:style>
-        <p:txBody>
-          <a:bodyPr rtlCol="0" anchor="ctr"/>
-          <a:lstStyle/>
-          <a:p>
-            <a:pPr algn="ctr"/>
-            <a:endParaRPr/>
-          </a:p>
-        </p:txBody>
-      </p:sp>
-      <p:sp>
-        <p:nvSpPr>
-          <p:cNvPr id="4" name="TextBox 3"/>
-          <p:cNvSpPr txBox="1"/>
-          <p:nvPr/>
-        </p:nvSpPr>
-        <p:spPr>
-          <a:xfrm>
-            <a:off x="1920240" y="2286000"/>
-            <a:ext cx="548640" cy="502920"/>
-          </a:xfrm>
-          <a:prstGeom prst="rect">
-            <a:avLst/>
-          </a:prstGeom>
-          <a:noFill/>
-        </p:spPr>
-        <p:txBody>
-          <a:bodyPr wrap="square" lIns="25400" tIns="25400" rIns="25400" bIns="25400" anchor="ctr">
-            <a:spAutoFit/>
-          </a:bodyPr>
-          <a:lstStyle/>
-          <a:p>
-            <a:pPr algn="l"/>
-            <a:r>
-              <a:rPr sz="1800" b="1">
-                <a:solidFill>
-                  <a:srgbClr val="6FD89A"/>
-                </a:solidFill>
-                <a:latin typeface="맑은 고딕"/>
-              </a:rPr>
-              <a:t>✓</a:t>
-            </a:r>
-          </a:p>
-        </p:txBody>
-      </p:sp>
-      <p:sp>
-        <p:nvSpPr>
-          <p:cNvPr id="5" name="TextBox 4"/>
-          <p:cNvSpPr txBox="1"/>
-          <p:nvPr/>
-        </p:nvSpPr>
-        <p:spPr>
-          <a:xfrm>
-            <a:off x="2468880" y="2286000"/>
-            <a:ext cx="7955279" cy="502920"/>
-          </a:xfrm>
-          <a:prstGeom prst="rect">
-            <a:avLst/>
-          </a:prstGeom>
-          <a:noFill/>
-        </p:spPr>
-        <p:txBody>
-          <a:bodyPr wrap="square" lIns="25400" tIns="25400" rIns="25400" bIns="25400" anchor="ctr">
-            <a:spAutoFit/>
-          </a:bodyPr>
-          <a:lstStyle/>
-          <a:p>
-            <a:pPr algn="l"/>
-            <a:r>
-              <a:rPr sz="1500" b="0">
-                <a:solidFill>
-                  <a:srgbClr val="FFFFFF"/>
-                </a:solidFill>
-                <a:latin typeface="맑은 고딕"/>
-              </a:rPr>
-              <a:t>출입 신청 → 등록 → 비밀번호 안내 → 메일 발송 전 과정 구현 완료</a:t>
-            </a:r>
-          </a:p>
-        </p:txBody>
-      </p:sp>
-      <p:sp>
-        <p:nvSpPr>
-          <p:cNvPr id="10" name="TextBox 9"/>
-          <p:cNvSpPr txBox="1"/>
-          <p:nvPr/>
-        </p:nvSpPr>
-        <p:spPr>
-          <a:xfrm>
-            <a:off x="1920240" y="2930980"/>
-            <a:ext cx="548640" cy="502920"/>
-          </a:xfrm>
-          <a:prstGeom prst="rect">
-            <a:avLst/>
-          </a:prstGeom>
-          <a:noFill/>
-        </p:spPr>
-        <p:txBody>
-          <a:bodyPr wrap="square" lIns="25400" tIns="25400" rIns="25400" bIns="25400" anchor="ctr">
-            <a:spAutoFit/>
-          </a:bodyPr>
-          <a:lstStyle/>
-          <a:p>
-            <a:pPr algn="l"/>
-            <a:r>
-              <a:rPr sz="1800" b="1">
-                <a:solidFill>
-                  <a:srgbClr val="6FD89A"/>
-                </a:solidFill>
-                <a:latin typeface="맑은 고딕"/>
-              </a:rPr>
-              <a:t>✓</a:t>
-            </a:r>
-          </a:p>
-        </p:txBody>
-      </p:sp>
-      <p:sp>
-        <p:nvSpPr>
-          <p:cNvPr id="11" name="TextBox 10"/>
-          <p:cNvSpPr txBox="1"/>
-          <p:nvPr/>
-        </p:nvSpPr>
-        <p:spPr>
-          <a:xfrm>
-            <a:off x="2468880" y="2930980"/>
-            <a:ext cx="7955279" cy="502920"/>
-          </a:xfrm>
-          <a:prstGeom prst="rect">
-            <a:avLst/>
-          </a:prstGeom>
-          <a:noFill/>
-        </p:spPr>
-        <p:txBody>
-          <a:bodyPr wrap="square" lIns="25400" tIns="25400" rIns="25400" bIns="25400" anchor="ctr">
-            <a:spAutoFit/>
-          </a:bodyPr>
-          <a:lstStyle/>
-          <a:p>
-            <a:pPr algn="l"/>
-            <a:r>
-              <a:rPr sz="1500" b="0" dirty="0" err="1">
-                <a:solidFill>
-                  <a:srgbClr val="FFFFFF"/>
-                </a:solidFill>
-                <a:latin typeface="맑은 고딕"/>
-              </a:rPr>
-              <a:t>담당자</a:t>
-            </a:r>
-            <a:r>
-              <a:rPr sz="1500" b="0" dirty="0">
-                <a:solidFill>
-                  <a:srgbClr val="FFFFFF"/>
-                </a:solidFill>
-                <a:latin typeface="맑은 고딕"/>
-              </a:rPr>
-              <a:t>(wayne9044@inzent.com) </a:t>
-            </a:r>
-            <a:r>
-              <a:rPr sz="1500" b="0" dirty="0" err="1">
-                <a:solidFill>
-                  <a:srgbClr val="FFFFFF"/>
-                </a:solidFill>
-                <a:latin typeface="맑은 고딕"/>
-              </a:rPr>
-              <a:t>메일</a:t>
-            </a:r>
-            <a:r>
-              <a:rPr sz="1500" b="0" dirty="0">
-                <a:solidFill>
-                  <a:srgbClr val="FFFFFF"/>
-                </a:solidFill>
-                <a:latin typeface="맑은 고딕"/>
-              </a:rPr>
-              <a:t> </a:t>
-            </a:r>
-            <a:r>
-              <a:rPr sz="1500" b="0" dirty="0" err="1">
-                <a:solidFill>
-                  <a:srgbClr val="FFFFFF"/>
-                </a:solidFill>
-                <a:latin typeface="맑은 고딕"/>
-              </a:rPr>
-              <a:t>자동</a:t>
-            </a:r>
-            <a:r>
-              <a:rPr sz="1500" b="0" dirty="0">
-                <a:solidFill>
-                  <a:srgbClr val="FFFFFF"/>
-                </a:solidFill>
-                <a:latin typeface="맑은 고딕"/>
-              </a:rPr>
-              <a:t> </a:t>
-            </a:r>
-            <a:r>
-              <a:rPr sz="1500" b="0" dirty="0" err="1">
-                <a:solidFill>
-                  <a:srgbClr val="FFFFFF"/>
-                </a:solidFill>
-                <a:latin typeface="맑은 고딕"/>
-              </a:rPr>
-              <a:t>알림</a:t>
-            </a:r>
-            <a:r>
-              <a:rPr sz="1500" b="0" dirty="0">
-                <a:solidFill>
-                  <a:srgbClr val="FFFFFF"/>
-                </a:solidFill>
-                <a:latin typeface="맑은 고딕"/>
-              </a:rPr>
-              <a:t> (</a:t>
-            </a:r>
-            <a:r>
-              <a:rPr sz="1500" b="0" dirty="0" err="1">
-                <a:solidFill>
-                  <a:srgbClr val="FFFFFF"/>
-                </a:solidFill>
-                <a:latin typeface="맑은 고딕"/>
-              </a:rPr>
-              <a:t>신청시각</a:t>
-            </a:r>
-            <a:r>
-              <a:rPr sz="1500" b="0" dirty="0">
-                <a:solidFill>
-                  <a:srgbClr val="FFFFFF"/>
-                </a:solidFill>
-                <a:latin typeface="맑은 고딕"/>
-              </a:rPr>
-              <a:t> </a:t>
-            </a:r>
-            <a:r>
-              <a:rPr sz="1500" b="0" dirty="0" err="1">
-                <a:solidFill>
-                  <a:srgbClr val="FFFFFF"/>
-                </a:solidFill>
-                <a:latin typeface="맑은 고딕"/>
-              </a:rPr>
-              <a:t>포함</a:t>
-            </a:r>
-            <a:r>
-              <a:rPr sz="1500" b="0" dirty="0">
-                <a:solidFill>
-                  <a:srgbClr val="FFFFFF"/>
-                </a:solidFill>
-                <a:latin typeface="맑은 고딕"/>
-              </a:rPr>
-              <a:t>)</a:t>
-            </a:r>
-          </a:p>
-        </p:txBody>
-      </p:sp>
-      <p:sp>
-        <p:nvSpPr>
-          <p:cNvPr id="14" name="TextBox 13"/>
-          <p:cNvSpPr txBox="1"/>
-          <p:nvPr/>
-        </p:nvSpPr>
-        <p:spPr>
-          <a:xfrm>
-            <a:off x="914400" y="5852160"/>
-            <a:ext cx="10360152" cy="457200"/>
-          </a:xfrm>
-          <a:prstGeom prst="rect">
-            <a:avLst/>
-          </a:prstGeom>
-          <a:noFill/>
-        </p:spPr>
-        <p:txBody>
-          <a:bodyPr wrap="square" lIns="25400" tIns="25400" rIns="25400" bIns="25400" anchor="t">
-            <a:spAutoFit/>
-          </a:bodyPr>
-          <a:lstStyle/>
-          <a:p>
-            <a:pPr algn="ctr"/>
-            <a:r>
-              <a:rPr sz="1400" b="0">
-                <a:solidFill>
-                  <a:srgbClr val="9AA6C4"/>
-                </a:solidFill>
-                <a:latin typeface="맑은 고딕"/>
-              </a:rPr>
-              <a:t>서버실 출입관리 시스템 — 감사합니다.</a:t>
-            </a:r>
-          </a:p>
-        </p:txBody>
-      </p:sp>
-    </p:spTree>
-    <p:extLst>
-      <p:ext uri="{BB962C8B-B14F-4D97-AF65-F5344CB8AC3E}">
-        <p14:creationId xmlns:p14="http://schemas.microsoft.com/office/powerpoint/2010/main" val="3536880543"/>
       </p:ext>
     </p:extLst>
   </p:cSld>

--- a/docs/서버실_출입관리_완료보고.pptx
+++ b/docs/서버실_출입관리_완료보고.pptx
@@ -5678,124 +5678,7 @@
                 </a:solidFill>
                 <a:latin typeface="맑은 고딕"/>
               </a:rPr>
-              <a:t>출입</a:t>
-            </a:r>
-            <a:r>
-              <a:rPr sz="1200" b="0" dirty="0">
-                <a:solidFill>
-                  <a:srgbClr val="6B6A66"/>
-                </a:solidFill>
-                <a:latin typeface="맑은 고딕"/>
-              </a:rPr>
-              <a:t> </a:t>
-            </a:r>
-            <a:r>
-              <a:rPr sz="1200" b="0" dirty="0" err="1" smtClean="0">
-                <a:solidFill>
-                  <a:srgbClr val="6B6A66"/>
-                </a:solidFill>
-                <a:latin typeface="맑은 고딕"/>
-              </a:rPr>
-              <a:t>현황</a:t>
-            </a:r>
-            <a:r>
-              <a:rPr sz="1200" b="0" dirty="0" smtClean="0">
-                <a:solidFill>
-                  <a:srgbClr val="6B6A66"/>
-                </a:solidFill>
-                <a:latin typeface="맑은 고딕"/>
-              </a:rPr>
-              <a:t> </a:t>
-            </a:r>
-            <a:r>
-              <a:rPr sz="1200" b="0" dirty="0">
-                <a:solidFill>
-                  <a:srgbClr val="6B6A66"/>
-                </a:solidFill>
-                <a:latin typeface="맑은 고딕"/>
-              </a:rPr>
-              <a:t>· </a:t>
-            </a:r>
-            <a:r>
-              <a:rPr sz="1200" b="0" dirty="0" err="1">
-                <a:solidFill>
-                  <a:srgbClr val="6B6A66"/>
-                </a:solidFill>
-                <a:latin typeface="맑은 고딕"/>
-              </a:rPr>
-              <a:t>기간</a:t>
-            </a:r>
-            <a:r>
-              <a:rPr sz="1200" b="0" dirty="0">
-                <a:solidFill>
-                  <a:srgbClr val="6B6A66"/>
-                </a:solidFill>
-                <a:latin typeface="맑은 고딕"/>
-              </a:rPr>
-              <a:t>/</a:t>
-            </a:r>
-            <a:r>
-              <a:rPr sz="1200" b="0" dirty="0" err="1">
-                <a:solidFill>
-                  <a:srgbClr val="6B6A66"/>
-                </a:solidFill>
-                <a:latin typeface="맑은 고딕"/>
-              </a:rPr>
-              <a:t>키워드</a:t>
-            </a:r>
-            <a:r>
-              <a:rPr sz="1200" b="0" dirty="0">
-                <a:solidFill>
-                  <a:srgbClr val="6B6A66"/>
-                </a:solidFill>
-                <a:latin typeface="맑은 고딕"/>
-              </a:rPr>
-              <a:t> </a:t>
-            </a:r>
-            <a:r>
-              <a:rPr sz="1200" b="0" dirty="0" err="1">
-                <a:solidFill>
-                  <a:srgbClr val="6B6A66"/>
-                </a:solidFill>
-                <a:latin typeface="맑은 고딕"/>
-              </a:rPr>
-              <a:t>검색</a:t>
-            </a:r>
-            <a:r>
-              <a:rPr sz="1200" b="0" dirty="0">
-                <a:solidFill>
-                  <a:srgbClr val="6B6A66"/>
-                </a:solidFill>
-                <a:latin typeface="맑은 고딕"/>
-              </a:rPr>
-              <a:t> · </a:t>
-            </a:r>
-            <a:r>
-              <a:rPr sz="1200" b="0" dirty="0" err="1">
-                <a:solidFill>
-                  <a:srgbClr val="6B6A66"/>
-                </a:solidFill>
-                <a:latin typeface="맑은 고딕"/>
-              </a:rPr>
-              <a:t>실시간</a:t>
-            </a:r>
-            <a:r>
-              <a:rPr sz="1200" b="0" dirty="0">
-                <a:solidFill>
-                  <a:srgbClr val="6B6A66"/>
-                </a:solidFill>
-                <a:latin typeface="맑은 고딕"/>
-              </a:rPr>
-              <a:t> </a:t>
-            </a:r>
-            <a:r>
-              <a:rPr sz="1200" b="0" dirty="0" err="1">
-                <a:solidFill>
-                  <a:srgbClr val="6B6A66"/>
-                </a:solidFill>
-                <a:latin typeface="맑은 고딕"/>
-              </a:rPr>
-              <a:t>갱신</a:t>
+              <a:t>출입 현황·검색·실시간 갱신 · 비밀번호/공지 설정 · 사번 접근 제어</a:t>
             </a:r>
             <a:endParaRPr sz="1200" b="0" dirty="0">
               <a:solidFill>
@@ -8090,7 +7973,7 @@
                 </a:solidFill>
                 <a:latin typeface="맑은 고딕"/>
               </a:rPr>
-              <a:t>출입 현황 모니터링 (/admin)</a:t>
+              <a:t>출입 현황 · 비밀번호 · 공지 관리 (/admin)</a:t>
             </a:r>
           </a:p>
         </p:txBody>
@@ -8228,98 +8111,17 @@
           <a:p>
             <a:pPr algn="l">
               <a:spcAft>
-                <a:spcPts val="900"/>
+                <a:spcPts val="200"/>
               </a:spcAft>
             </a:pPr>
             <a:r>
-              <a:rPr sz="1250" b="0" dirty="0">
-                <a:solidFill>
-                  <a:srgbClr val="6B6A66"/>
-                </a:solidFill>
-                <a:latin typeface="맑은 고딕"/>
-              </a:rPr>
-              <a:t>• </a:t>
-            </a:r>
-            <a:r>
-              <a:rPr sz="1250" b="0" dirty="0" err="1">
-                <a:solidFill>
-                  <a:srgbClr val="6B6A66"/>
-                </a:solidFill>
-                <a:latin typeface="맑은 고딕"/>
-              </a:rPr>
-              <a:t>오늘</a:t>
-            </a:r>
-            <a:r>
-              <a:rPr sz="1250" b="0" dirty="0">
-                <a:solidFill>
-                  <a:srgbClr val="6B6A66"/>
-                </a:solidFill>
-                <a:latin typeface="맑은 고딕"/>
-              </a:rPr>
-              <a:t> </a:t>
-            </a:r>
-            <a:r>
-              <a:rPr sz="1250" b="0" dirty="0" err="1">
-                <a:solidFill>
-                  <a:srgbClr val="6B6A66"/>
-                </a:solidFill>
-                <a:latin typeface="맑은 고딕"/>
-              </a:rPr>
-              <a:t>출입</a:t>
-            </a:r>
-            <a:r>
-              <a:rPr sz="1250" b="0" dirty="0">
-                <a:solidFill>
-                  <a:srgbClr val="6B6A66"/>
-                </a:solidFill>
-                <a:latin typeface="맑은 고딕"/>
-              </a:rPr>
-              <a:t> </a:t>
-            </a:r>
-            <a:r>
-              <a:rPr sz="1250" b="0" dirty="0" err="1">
-                <a:solidFill>
-                  <a:srgbClr val="6B6A66"/>
-                </a:solidFill>
-                <a:latin typeface="맑은 고딕"/>
-              </a:rPr>
-              <a:t>건수</a:t>
-            </a:r>
-            <a:r>
-              <a:rPr sz="1250" b="0" dirty="0">
-                <a:solidFill>
-                  <a:srgbClr val="6B6A66"/>
-                </a:solidFill>
-                <a:latin typeface="맑은 고딕"/>
-              </a:rPr>
-              <a:t> · 총 </a:t>
-            </a:r>
-            <a:r>
-              <a:rPr sz="1250" b="0" dirty="0" err="1">
-                <a:solidFill>
-                  <a:srgbClr val="6B6A66"/>
-                </a:solidFill>
-                <a:latin typeface="맑은 고딕"/>
-              </a:rPr>
-              <a:t>출입</a:t>
-            </a:r>
-            <a:r>
-              <a:rPr sz="1250" b="0" dirty="0">
-                <a:solidFill>
-                  <a:srgbClr val="6B6A66"/>
-                </a:solidFill>
-                <a:latin typeface="맑은 고딕"/>
-              </a:rPr>
-              <a:t> </a:t>
-            </a:r>
-            <a:r>
-              <a:rPr sz="1250" b="0" dirty="0" err="1" smtClean="0">
-                <a:solidFill>
-                  <a:srgbClr val="6B6A66"/>
-                </a:solidFill>
-                <a:latin typeface="맑은 고딕"/>
-              </a:rPr>
-              <a:t>인원</a:t>
+              <a:rPr sz="1250" b="1">
+                <a:solidFill>
+                  <a:srgbClr val="3B6FD4"/>
+                </a:solidFill>
+                <a:latin typeface="맑은 고딕"/>
+              </a:rPr>
+              <a:t>출입 현황 모니터링</a:t>
             </a:r>
             <a:endParaRPr lang="en-US" sz="1250" b="0" dirty="0" smtClean="0">
               <a:solidFill>
@@ -8329,257 +8131,183 @@
             </a:endParaRPr>
           </a:p>
           <a:p>
-            <a:pPr algn="l">
+            <a:pPr>
               <a:spcAft>
-                <a:spcPts val="900"/>
+                <a:spcPts val="300"/>
               </a:spcAft>
             </a:pPr>
             <a:r>
-              <a:rPr sz="1250" b="0" dirty="0" smtClean="0">
-                <a:solidFill>
-                  <a:srgbClr val="6B6A66"/>
-                </a:solidFill>
-                <a:latin typeface="맑은 고딕"/>
-              </a:rPr>
-              <a:t>• </a:t>
-            </a:r>
-            <a:r>
-              <a:rPr sz="1250" b="0" dirty="0" err="1">
-                <a:solidFill>
-                  <a:srgbClr val="6B6A66"/>
-                </a:solidFill>
-                <a:latin typeface="맑은 고딕"/>
-              </a:rPr>
-              <a:t>기간</a:t>
-            </a:r>
-            <a:r>
-              <a:rPr sz="1250" b="0" dirty="0">
-                <a:solidFill>
-                  <a:srgbClr val="6B6A66"/>
-                </a:solidFill>
-                <a:latin typeface="맑은 고딕"/>
-              </a:rPr>
-              <a:t> / </a:t>
-            </a:r>
-            <a:r>
-              <a:rPr sz="1250" b="0" dirty="0" err="1">
-                <a:solidFill>
-                  <a:srgbClr val="6B6A66"/>
-                </a:solidFill>
-                <a:latin typeface="맑은 고딕"/>
-              </a:rPr>
-              <a:t>성명·사번</a:t>
-            </a:r>
-            <a:r>
-              <a:rPr sz="1250" b="0" dirty="0">
-                <a:solidFill>
-                  <a:srgbClr val="6B6A66"/>
-                </a:solidFill>
-                <a:latin typeface="맑은 고딕"/>
-              </a:rPr>
-              <a:t> </a:t>
-            </a:r>
-            <a:r>
-              <a:rPr sz="1250" b="0" dirty="0" err="1">
-                <a:solidFill>
-                  <a:srgbClr val="6B6A66"/>
-                </a:solidFill>
-                <a:latin typeface="맑은 고딕"/>
-              </a:rPr>
-              <a:t>검색</a:t>
-            </a:r>
-            <a:endParaRPr sz="1250" b="0" dirty="0">
-              <a:solidFill>
-                <a:srgbClr val="6B6A66"/>
-              </a:solidFill>
-              <a:latin typeface="맑은 고딕"/>
-            </a:endParaRPr>
-          </a:p>
-          <a:p>
-            <a:pPr algn="l">
+              <a:rPr sz="1200" b="0">
+                <a:solidFill>
+                  <a:srgbClr val="6B6A66"/>
+                </a:solidFill>
+                <a:latin typeface="맑은 고딕"/>
+              </a:rPr>
+              <a:t>• 오늘 출입 건수 · 총 출입 인원</a:t>
+            </a:r>
+          </a:p>
+          <a:p>
+            <a:pPr>
               <a:spcAft>
-                <a:spcPts val="900"/>
+                <a:spcPts val="300"/>
               </a:spcAft>
             </a:pPr>
             <a:r>
-              <a:rPr sz="1250" b="0" dirty="0">
-                <a:solidFill>
-                  <a:srgbClr val="6B6A66"/>
-                </a:solidFill>
-                <a:latin typeface="맑은 고딕"/>
-              </a:rPr>
-              <a:t>• </a:t>
-            </a:r>
-            <a:r>
-              <a:rPr sz="1250" b="0" dirty="0" err="1">
-                <a:solidFill>
-                  <a:srgbClr val="6B6A66"/>
-                </a:solidFill>
-                <a:latin typeface="맑은 고딕"/>
-              </a:rPr>
-              <a:t>출입</a:t>
-            </a:r>
-            <a:r>
-              <a:rPr sz="1250" b="0" dirty="0">
-                <a:solidFill>
-                  <a:srgbClr val="6B6A66"/>
-                </a:solidFill>
-                <a:latin typeface="맑은 고딕"/>
-              </a:rPr>
-              <a:t> </a:t>
-            </a:r>
-            <a:r>
-              <a:rPr sz="1250" b="0" dirty="0" err="1">
-                <a:solidFill>
-                  <a:srgbClr val="6B6A66"/>
-                </a:solidFill>
-                <a:latin typeface="맑은 고딕"/>
-              </a:rPr>
-              <a:t>기록</a:t>
-            </a:r>
-            <a:r>
-              <a:rPr sz="1250" b="0" dirty="0">
-                <a:solidFill>
-                  <a:srgbClr val="6B6A66"/>
-                </a:solidFill>
-                <a:latin typeface="맑은 고딕"/>
-              </a:rPr>
-              <a:t> </a:t>
-            </a:r>
-            <a:r>
-              <a:rPr sz="1250" b="0" dirty="0" err="1">
-                <a:solidFill>
-                  <a:srgbClr val="6B6A66"/>
-                </a:solidFill>
-                <a:latin typeface="맑은 고딕"/>
-              </a:rPr>
-              <a:t>목록</a:t>
-            </a:r>
-            <a:r>
-              <a:rPr sz="1250" b="0" dirty="0">
-                <a:solidFill>
-                  <a:srgbClr val="6B6A66"/>
-                </a:solidFill>
-                <a:latin typeface="맑은 고딕"/>
-              </a:rPr>
-              <a:t>(</a:t>
-            </a:r>
-            <a:r>
-              <a:rPr sz="1250" b="0" dirty="0" err="1">
-                <a:solidFill>
-                  <a:srgbClr val="6B6A66"/>
-                </a:solidFill>
-                <a:latin typeface="맑은 고딕"/>
-              </a:rPr>
-              <a:t>연락처</a:t>
-            </a:r>
-            <a:r>
-              <a:rPr sz="1250" b="0" dirty="0">
-                <a:solidFill>
-                  <a:srgbClr val="6B6A66"/>
-                </a:solidFill>
-                <a:latin typeface="맑은 고딕"/>
-              </a:rPr>
-              <a:t> </a:t>
-            </a:r>
-            <a:r>
-              <a:rPr sz="1250" b="0" dirty="0" err="1">
-                <a:solidFill>
-                  <a:srgbClr val="6B6A66"/>
-                </a:solidFill>
-                <a:latin typeface="맑은 고딕"/>
-              </a:rPr>
-              <a:t>포함</a:t>
-            </a:r>
-            <a:r>
-              <a:rPr sz="1250" b="0" dirty="0">
-                <a:solidFill>
-                  <a:srgbClr val="6B6A66"/>
-                </a:solidFill>
-                <a:latin typeface="맑은 고딕"/>
-              </a:rPr>
-              <a:t>)</a:t>
-            </a:r>
-          </a:p>
-          <a:p>
-            <a:pPr algn="l">
+              <a:rPr sz="1200" b="0">
+                <a:solidFill>
+                  <a:srgbClr val="6B6A66"/>
+                </a:solidFill>
+                <a:latin typeface="맑은 고딕"/>
+              </a:rPr>
+              <a:t>• 기간 / 성명·사번 검색</a:t>
+            </a:r>
+          </a:p>
+          <a:p>
+            <a:pPr>
               <a:spcAft>
-                <a:spcPts val="900"/>
+                <a:spcPts val="300"/>
               </a:spcAft>
             </a:pPr>
             <a:r>
-              <a:rPr sz="1250" b="0" dirty="0">
-                <a:solidFill>
-                  <a:srgbClr val="6B6A66"/>
-                </a:solidFill>
-                <a:latin typeface="맑은 고딕"/>
-              </a:rPr>
-              <a:t>• 30초마다 </a:t>
-            </a:r>
-            <a:r>
-              <a:rPr sz="1250" b="0" dirty="0" err="1">
-                <a:solidFill>
-                  <a:srgbClr val="6B6A66"/>
-                </a:solidFill>
-                <a:latin typeface="맑은 고딕"/>
-              </a:rPr>
-              <a:t>현황</a:t>
-            </a:r>
-            <a:r>
-              <a:rPr sz="1250" b="0" dirty="0">
-                <a:solidFill>
-                  <a:srgbClr val="6B6A66"/>
-                </a:solidFill>
-                <a:latin typeface="맑은 고딕"/>
-              </a:rPr>
-              <a:t> </a:t>
-            </a:r>
-            <a:r>
-              <a:rPr sz="1250" b="0" dirty="0" err="1">
-                <a:solidFill>
-                  <a:srgbClr val="6B6A66"/>
-                </a:solidFill>
-                <a:latin typeface="맑은 고딕"/>
-              </a:rPr>
-              <a:t>자동</a:t>
-            </a:r>
-            <a:r>
-              <a:rPr sz="1250" b="0" dirty="0">
-                <a:solidFill>
-                  <a:srgbClr val="6B6A66"/>
-                </a:solidFill>
-                <a:latin typeface="맑은 고딕"/>
-              </a:rPr>
-              <a:t> </a:t>
-            </a:r>
-            <a:r>
-              <a:rPr sz="1250" b="0" dirty="0" err="1">
-                <a:solidFill>
-                  <a:srgbClr val="6B6A66"/>
-                </a:solidFill>
-                <a:latin typeface="맑은 고딕"/>
-              </a:rPr>
-              <a:t>갱신</a:t>
-            </a:r>
-            <a:endParaRPr sz="1250" b="0" dirty="0">
-              <a:solidFill>
-                <a:srgbClr val="6B6A66"/>
-              </a:solidFill>
-              <a:latin typeface="맑은 고딕"/>
-            </a:endParaRPr>
+              <a:rPr sz="1200" b="0">
+                <a:solidFill>
+                  <a:srgbClr val="6B6A66"/>
+                </a:solidFill>
+                <a:latin typeface="맑은 고딕"/>
+              </a:rPr>
+              <a:t>• 출입 기록(연락처 복호화 표시)</a:t>
+            </a:r>
+          </a:p>
+          <a:p>
+            <a:pPr>
+              <a:spcAft>
+                <a:spcPts val="300"/>
+              </a:spcAft>
+            </a:pPr>
+            <a:r>
+              <a:rPr sz="1200" b="0">
+                <a:solidFill>
+                  <a:srgbClr val="6B6A66"/>
+                </a:solidFill>
+                <a:latin typeface="맑은 고딕"/>
+              </a:rPr>
+              <a:t>• 30초마다 현황 자동 갱신</a:t>
+            </a:r>
+          </a:p>
+          <a:p>
+            <a:pPr>
+              <a:spcBef>
+                <a:spcPts val="700"/>
+              </a:spcBef>
+              <a:spcAft>
+                <a:spcPts val="200"/>
+              </a:spcAft>
+            </a:pPr>
+            <a:r>
+              <a:rPr sz="1250" b="1">
+                <a:solidFill>
+                  <a:srgbClr val="3B6FD4"/>
+                </a:solidFill>
+                <a:latin typeface="맑은 고딕"/>
+              </a:rPr>
+              <a:t>⚙ 설정 패널 (접기/펼치기)</a:t>
+            </a:r>
+          </a:p>
+          <a:p>
+            <a:pPr>
+              <a:spcAft>
+                <a:spcPts val="300"/>
+              </a:spcAft>
+            </a:pPr>
+            <a:r>
+              <a:rPr sz="1200" b="0">
+                <a:solidFill>
+                  <a:srgbClr val="6B6A66"/>
+                </a:solidFill>
+                <a:latin typeface="맑은 고딕"/>
+              </a:rPr>
+              <a:t>• 서버실 출입 비밀번호 변경</a:t>
+            </a:r>
+          </a:p>
+          <a:p>
+            <a:pPr>
+              <a:spcAft>
+                <a:spcPts val="300"/>
+              </a:spcAft>
+            </a:pPr>
+            <a:r>
+              <a:rPr sz="1200" b="0">
+                <a:solidFill>
+                  <a:srgbClr val="6B6A66"/>
+                </a:solidFill>
+                <a:latin typeface="맑은 고딕"/>
+              </a:rPr>
+              <a:t>• 마지막 변경일 · 경과일수 표시</a:t>
+            </a:r>
+          </a:p>
+          <a:p>
+            <a:pPr>
+              <a:spcAft>
+                <a:spcPts val="300"/>
+              </a:spcAft>
+            </a:pPr>
+            <a:r>
+              <a:rPr sz="1200" b="0">
+                <a:solidFill>
+                  <a:srgbClr val="6B6A66"/>
+                </a:solidFill>
+                <a:latin typeface="맑은 고딕"/>
+              </a:rPr>
+              <a:t>• 공지사항 작성·삭제 → 사용자 배너</a:t>
+            </a:r>
+          </a:p>
+          <a:p>
+            <a:pPr>
+              <a:spcBef>
+                <a:spcPts val="700"/>
+              </a:spcBef>
+              <a:spcAft>
+                <a:spcPts val="200"/>
+              </a:spcAft>
+            </a:pPr>
+            <a:r>
+              <a:rPr sz="1250" b="1">
+                <a:solidFill>
+                  <a:srgbClr val="3B6FD4"/>
+                </a:solidFill>
+                <a:latin typeface="맑은 고딕"/>
+              </a:rPr>
+              <a:t>접근 권한</a:t>
+            </a:r>
+          </a:p>
+          <a:p>
+            <a:pPr>
+              <a:spcAft>
+                <a:spcPts val="300"/>
+              </a:spcAft>
+            </a:pPr>
+            <a:r>
+              <a:rPr sz="1200" b="0">
+                <a:solidFill>
+                  <a:srgbClr val="6B6A66"/>
+                </a:solidFill>
+                <a:latin typeface="맑은 고딕"/>
+              </a:rPr>
+              <a:t>• 허용된 사번만 대시보드 접근</a:t>
+            </a:r>
           </a:p>
         </p:txBody>
       </p:sp>
       <p:pic>
         <p:nvPicPr>
-          <p:cNvPr id="11" name="Picture 10" descr="guide_04_admin.png"/>
+          <p:cNvPr id="14" name="Picture 10" descr="admin_new.png"/>
           <p:cNvPicPr>
             <a:picLocks noChangeAspect="1"/>
           </p:cNvPicPr>
           <p:nvPr/>
         </p:nvPicPr>
         <p:blipFill>
-          <a:blip r:embed="rId3"/>
+          <a:blip r:embed="rId4"/>
           <a:stretch>
             <a:fillRect/>
           </a:stretch>
@@ -8592,11 +8320,6 @@
           <a:prstGeom prst="rect">
             <a:avLst/>
           </a:prstGeom>
-          <a:ln w="22225">
-            <a:solidFill>
-              <a:srgbClr val="222B45"/>
-            </a:solidFill>
-          </a:ln>
         </p:spPr>
       </p:pic>
       <p:sp>
@@ -8738,7 +8461,7 @@
         <p:spPr>
           <a:xfrm>
             <a:off x="502920" y="1280160"/>
-            <a:ext cx="10950646" cy="1119244"/>
+            <a:ext cx="10950646" cy="1755648"/>
           </a:xfrm>
           <a:prstGeom prst="rect">
             <a:avLst/>
@@ -9744,6 +9467,73 @@
                 <a:latin typeface="맑은 고딕"/>
               </a:rPr>
               <a:t>)</a:t>
+            </a:r>
+          </a:p>
+        </p:txBody>
+      </p:sp>
+      <p:sp>
+        <p:nvSpPr>
+          <p:cNvPr id="38" name="TextBox 39"/>
+          <p:cNvSpPr txBox="1"/>
+          <p:nvPr/>
+        </p:nvSpPr>
+        <p:spPr>
+          <a:xfrm>
+            <a:off x="631502" y="2541463"/>
+            <a:ext cx="548640" cy="502920"/>
+          </a:xfrm>
+          <a:prstGeom prst="rect">
+            <a:avLst/>
+          </a:prstGeom>
+          <a:noFill/>
+        </p:spPr>
+        <p:txBody>
+          <a:bodyPr wrap="square" lIns="25400" tIns="25400" rIns="25400" bIns="25400" anchor="ctr">
+            <a:spAutoFit/>
+          </a:bodyPr>
+          <a:lstStyle/>
+          <a:p>
+            <a:pPr algn="l"/>
+            <a:r>
+              <a:rPr sz="1800" b="1">
+                <a:solidFill>
+                  <a:srgbClr val="6FD89A"/>
+                </a:solidFill>
+                <a:latin typeface="맑은 고딕"/>
+              </a:rPr>
+              <a:t>✓</a:t>
+            </a:r>
+          </a:p>
+        </p:txBody>
+      </p:sp>
+      <p:sp>
+        <p:nvSpPr>
+          <p:cNvPr id="39" name="TextBox 40"/>
+          <p:cNvSpPr txBox="1"/>
+          <p:nvPr/>
+        </p:nvSpPr>
+        <p:spPr>
+          <a:xfrm>
+            <a:off x="1180142" y="2651858"/>
+            <a:ext cx="7955279" cy="282129"/>
+          </a:xfrm>
+          <a:prstGeom prst="rect">
+            <a:avLst/>
+          </a:prstGeom>
+          <a:noFill/>
+        </p:spPr>
+        <p:txBody>
+          <a:bodyPr wrap="square" lIns="25400" tIns="25400" rIns="25400" bIns="25400" anchor="ctr">
+            <a:spAutoFit/>
+          </a:bodyPr>
+          <a:lstStyle/>
+          <a:p>
+            <a:pPr algn="l"/>
+            <a:r>
+              <a:rPr sz="1500" b="0" dirty="0" err="1">
+                <a:latin typeface="맑은 고딕"/>
+              </a:rPr>
+              <a:t>관리자: 비밀번호 변경 · 공지사항 · 설정 패널 · 사번 접근 제어</a:t>
             </a:r>
           </a:p>
         </p:txBody>
